--- a/lecons/LSA/Climatology/LSA_CLIM_L14_Vertical_Motions_Stability_and_Instability.pptx
+++ b/lecons/LSA/Climatology/LSA_CLIM_L14_Vertical_Motions_Stability_and_Instability.pptx
@@ -3020,7 +3020,7 @@
           <a:p>
             <a:r>
               <a:rPr lang="en-US" dirty="0"/>
-              <a:t>Let us copy DEFINITIONS. The key terms of this lesson are defined as follows. Write each point on a new line, with the key term first. When you finish, we go to the next slide.</a:t>
+              <a:t>Let us copy the definitions. The key terms of this lesson are defined as follows. On this slide we have Dry adiabatic lapse rate (DALR). Write each point on a new line, with the key term first, and explain it in your own words when we revise. When you finish, we go to the next slide.</a:t>
             </a:r>
             <a:endParaRPr lang="en-US" dirty="0"/>
           </a:p>
@@ -3108,7 +3108,7 @@
           <a:p>
             <a:r>
               <a:rPr lang="en-US" dirty="0"/>
-              <a:t>We continue with the same part. Write each point on a new line, with the key term first.</a:t>
+              <a:t>We continue with the definitions. On this slide we have Saturated adiabatic lapse rate (SALR). Write each point on a new line, with the key term first, and explain it in your own words when we revise.</a:t>
             </a:r>
             <a:endParaRPr lang="en-US" dirty="0"/>
           </a:p>
@@ -3196,7 +3196,7 @@
           <a:p>
             <a:r>
               <a:rPr lang="en-US" dirty="0"/>
-              <a:t>Let us copy Atmospheric Instability. Instability can be studied as follows. Write each point on a new line, with the key term first. When you finish, we go to the next slide.</a:t>
+              <a:t>Let us copy Atmospheric Instability. Instability can be studied as follows. On this slide we have Meaning. Write each point on a new line, with the key term first, and explain it in your own words when we revise. When you finish, we go to the next slide.</a:t>
             </a:r>
             <a:endParaRPr lang="en-US" dirty="0"/>
           </a:p>
@@ -3284,7 +3284,7 @@
           <a:p>
             <a:r>
               <a:rPr lang="en-US" dirty="0"/>
-              <a:t>We continue with the same part. Write each point on a new line, with the key term first. When you finish, we go to the next slide.</a:t>
+              <a:t>We continue with Atmospheric Instability. On this slide we have Types. Write each point on a new line, with the key term first, and explain it in your own words when we revise. When you finish, we go to the next slide.</a:t>
             </a:r>
             <a:endParaRPr lang="en-US" dirty="0"/>
           </a:p>
@@ -3372,7 +3372,7 @@
           <a:p>
             <a:r>
               <a:rPr lang="en-US" dirty="0"/>
-              <a:t>We continue with the same part. Write each point on a new line, with the key term first.</a:t>
+              <a:t>We continue with Atmospheric Instability. On this slide we have Associated weather. Write each point on a new line, with the key term first, and explain it in your own words when we revise.</a:t>
             </a:r>
             <a:endParaRPr lang="en-US" dirty="0"/>
           </a:p>
@@ -3636,7 +3636,7 @@
           <a:p>
             <a:r>
               <a:rPr lang="en-US" dirty="0"/>
-              <a:t>Let us copy Atmospheric Stability. Stability can be studied as follows. Write each point on a new line, with the key term first. When you finish, we go to the next slide.</a:t>
+              <a:t>Let us copy Atmospheric Stability. Stability can be studied as follows. On this slide we have Meaning. Write each point on a new line, with the key term first, and explain it in your own words when we revise. When you finish, we go to the next slide.</a:t>
             </a:r>
             <a:endParaRPr lang="en-US" dirty="0"/>
           </a:p>
@@ -3724,7 +3724,7 @@
           <a:p>
             <a:r>
               <a:rPr lang="en-US" dirty="0"/>
-              <a:t>We continue with the same part. Write each point on a new line, with the key term first. When you finish, we go to the next slide.</a:t>
+              <a:t>We continue with Atmospheric Stability. On this slide we have Types. Write each point on a new line, with the key term first, and explain it in your own words when we revise. When you finish, we go to the next slide.</a:t>
             </a:r>
             <a:endParaRPr lang="en-US" dirty="0"/>
           </a:p>
@@ -3812,7 +3812,7 @@
           <a:p>
             <a:r>
               <a:rPr lang="en-US" dirty="0"/>
-              <a:t>We continue with the same part. Write each point on a new line, with the key term first.</a:t>
+              <a:t>We continue with Atmospheric Stability. On this slide we have Associated weather. Write each point on a new line, with the key term first, and explain it in your own words when we revise.</a:t>
             </a:r>
             <a:endParaRPr lang="en-US" dirty="0"/>
           </a:p>
@@ -5044,7 +5044,7 @@
           <a:p>
             <a:r>
               <a:rPr lang="en-US" dirty="0"/>
-              <a:t>Here is the plan of our lesson today. We shall correction of the homework; then objectives and recall; then real-life situation and action to take; then learning activities; then board summary; then evaluation, remediation and homework.</a:t>
+              <a:t>Here is the plan of our lesson today. First, we shall correct the homework. Then we shall look at the objectives and recall what you already know. After that, we shall study a situation from real life and the action to take, and do the learning activities. Finally, we shall copy the board summary, do the evaluation and the remediation, and I will give you the homework.</a:t>
             </a:r>
             <a:endParaRPr lang="en-US" dirty="0"/>
           </a:p>
@@ -6584,7 +6584,7 @@
                 <a:ea typeface="Times New Roman" pitchFamily="34" charset="-122"/>
                 <a:cs typeface="Times New Roman" pitchFamily="34" charset="-120"/>
               </a:rPr>
-              <a:t>Lesson 14: Vertical Motions: Stability and Instability</a:t>
+              <a:t>Lesson 14</a:t>
             </a:r>
             <a:endParaRPr lang="en-US" sz="2600" dirty="0"/>
           </a:p>
